--- a/docs/m5/智岗罗盘_答辩PPT_初稿.pptx
+++ b/docs/m5/智岗罗盘_答辩PPT_初稿.pptx
@@ -4884,7 +4884,7 @@
                 <a:ea typeface="Microsoft YaHei" pitchFamily="34" charset="-122"/>
                 <a:cs typeface="Microsoft YaHei" pitchFamily="34" charset="-120"/>
               </a:rPr>
-              <a:t>0.96</a:t>
+              <a:t>0.8906</a:t>
             </a:r>
             <a:endParaRPr lang="en-US" sz="4000" dirty="0"/>
           </a:p>
@@ -4962,7 +4962,7 @@
                 <a:ea typeface="Microsoft YaHei" pitchFamily="34" charset="-122"/>
                 <a:cs typeface="Microsoft YaHei" pitchFamily="34" charset="-120"/>
               </a:rPr>
-              <a:t>BT 权重 v2 · 684 对</a:t>
+              <a:t>BT 权重 v2 · 384 对 · Top-3 1.0</a:t>
             </a:r>
             <a:endParaRPr lang="en-US" sz="1150" dirty="0"/>
           </a:p>
